--- a/Project1.pptx
+++ b/Project1.pptx
@@ -14388,45 +14388,6 @@
           </a:extLst>
         </p:spPr>
       </p:pic>
-      <p:pic>
-        <p:nvPicPr>
-          <p:cNvPr id="5" name="Picture 2"/>
-          <p:cNvPicPr>
-            <a:picLocks noChangeAspect="1" noChangeArrowheads="1"/>
-          </p:cNvPicPr>
-          <p:nvPr/>
-        </p:nvPicPr>
-        <p:blipFill rotWithShape="1">
-          <a:blip r:embed="rId3">
-            <a:extLst>
-              <a:ext uri="{28A0092B-C50C-407E-A947-70E740481C1C}">
-                <a14:useLocalDpi xmlns:a14="http://schemas.microsoft.com/office/drawing/2010/main" val="0"/>
-              </a:ext>
-            </a:extLst>
-          </a:blip>
-          <a:srcRect l="15367" r="15367"/>
-          <a:stretch/>
-        </p:blipFill>
-        <p:spPr bwMode="auto">
-          <a:xfrm>
-            <a:off x="1695824" y="2355822"/>
-            <a:ext cx="2799441" cy="2688336"/>
-          </a:xfrm>
-          <a:prstGeom prst="rect">
-            <a:avLst/>
-          </a:prstGeom>
-          <a:noFill/>
-          <a:extLst>
-            <a:ext uri="{909E8E84-426E-40DD-AFC4-6F175D3DCCD1}">
-              <a14:hiddenFill xmlns:a14="http://schemas.microsoft.com/office/drawing/2010/main">
-                <a:solidFill>
-                  <a:srgbClr val="FFFFFF"/>
-                </a:solidFill>
-              </a14:hiddenFill>
-            </a:ext>
-          </a:extLst>
-        </p:spPr>
-      </p:pic>
       <p:sp>
         <p:nvSpPr>
           <p:cNvPr id="2" name="Title 1"/>
@@ -14519,21 +14480,22 @@
           <p:nvPr/>
         </p:nvPicPr>
         <p:blipFill>
-          <a:blip r:embed="rId4" cstate="print">
+          <a:blip r:embed="rId3" cstate="print">
             <a:extLst>
               <a:ext uri="{28A0092B-C50C-407E-A947-70E740481C1C}">
                 <a14:useLocalDpi xmlns:a14="http://schemas.microsoft.com/office/drawing/2010/main" val="0"/>
               </a:ext>
             </a:extLst>
           </a:blip>
+          <a:srcRect t="-27307" b="-25199"/>
           <a:stretch>
             <a:fillRect/>
           </a:stretch>
         </p:blipFill>
         <p:spPr>
           <a:xfrm>
-            <a:off x="5824168" y="3832988"/>
-            <a:ext cx="2493264" cy="1200912"/>
+            <a:off x="2126556" y="3280426"/>
+            <a:ext cx="1554480" cy="1371600"/>
           </a:xfrm>
           <a:prstGeom prst="rect">
             <a:avLst/>
